--- a/presentation/pitch-kit-postale-v2.pptx
+++ b/presentation/pitch-kit-postale-v2.pptx
@@ -287,6 +287,97 @@
           <a:bodyPr/>
           <a:lstStyle/>
           <a:p>
+            <a:pPr rtl="0"/>
+            <a:r>
+              <a:rPr lang="en-GB" dirty="0"/>
+              <a:t>A</a:t>
+            </a:r>
+            <a:r>
+              <a:rPr lang="en-IT" dirty="0"/>
+              <a:t>bbiamo scelto il Tema 01 che chiede di affiancare una persona con una difficoltà precisa mentre usa un servizio digitale reale. </a:t>
+            </a:r>
+            <a:br>
+              <a:rPr lang="en-IT" dirty="0"/>
+            </a:br>
+            <a:r>
+              <a:rPr lang="en-IT" dirty="0"/>
+              <a:t>Abbiamo, quindi, scelto una persona molto concreta: un cittadino straniero che deve rinnovare il permesso di soggiorno, da solo, senza un patronato, dal telefono, a qualsiasi ora.</a:t>
+            </a:r>
+          </a:p>
+          <a:p>
+            <a:pPr marL="0" marR="0" lvl="0" indent="0" algn="l" defTabSz="914400" rtl="0" eaLnBrk="1" fontAlgn="auto" latinLnBrk="0" hangingPunct="1">
+              <a:lnSpc>
+                <a:spcPct val="100000"/>
+              </a:lnSpc>
+              <a:spcBef>
+                <a:spcPts val="0"/>
+              </a:spcBef>
+              <a:spcAft>
+                <a:spcPts val="0"/>
+              </a:spcAft>
+              <a:buClrTx/>
+              <a:buSzTx/>
+              <a:buFontTx/>
+              <a:buNone/>
+              <a:tabLst/>
+              <a:defRPr/>
+            </a:pPr>
+            <a:r>
+              <a:rPr lang="en-IT" dirty="0"/>
+              <a:t>Il servizio digitale è il kit postale MOD. 209. Esiste, è ufficiale, e per molte delle persone che devono compilarlo è inaccessibile.</a:t>
+            </a:r>
+            <a:br>
+              <a:rPr lang="en-IT" dirty="0"/>
+            </a:br>
+            <a:br>
+              <a:rPr lang="en-IT" dirty="0"/>
+            </a:br>
+            <a:r>
+              <a:rPr lang="en-GB" dirty="0" err="1"/>
+              <a:t>Perché</a:t>
+            </a:r>
+            <a:r>
+              <a:rPr lang="en-GB" dirty="0"/>
+              <a:t> </a:t>
+            </a:r>
+            <a:r>
+              <a:rPr lang="en-GB" dirty="0" err="1"/>
+              <a:t>è</a:t>
+            </a:r>
+            <a:r>
+              <a:rPr lang="en-GB" dirty="0"/>
+              <a:t> </a:t>
+            </a:r>
+            <a:r>
+              <a:rPr lang="en-GB" dirty="0" err="1"/>
+              <a:t>inaccessibile</a:t>
+            </a:r>
+            <a:r>
+              <a:rPr lang="en-GB" dirty="0"/>
+              <a:t>?</a:t>
+            </a:r>
+          </a:p>
+          <a:p>
+            <a:pPr marL="0" marR="0" lvl="0" indent="0" algn="l" defTabSz="914400" rtl="0" eaLnBrk="1" fontAlgn="auto" latinLnBrk="0" hangingPunct="1">
+              <a:lnSpc>
+                <a:spcPct val="100000"/>
+              </a:lnSpc>
+              <a:spcBef>
+                <a:spcPts val="0"/>
+              </a:spcBef>
+              <a:spcAft>
+                <a:spcPts val="0"/>
+              </a:spcAft>
+              <a:buClrTx/>
+              <a:buSzTx/>
+              <a:buFontTx/>
+              <a:buNone/>
+              <a:tabLst/>
+              <a:defRPr/>
+            </a:pPr>
+            <a:endParaRPr lang="en-IT" dirty="0"/>
+          </a:p>
+          <a:p>
             <a:endParaRPr lang="en-US" dirty="0"/>
           </a:p>
         </p:txBody>
@@ -371,7 +462,70 @@
           <a:bodyPr/>
           <a:lstStyle/>
           <a:p>
-            <a:endParaRPr lang="en-US" dirty="0"/>
+            <a:pPr rtl="0"/>
+            <a:r>
+              <a:rPr lang="en-IT" dirty="0"/>
+              <a:t>l modulo ha </a:t>
+            </a:r>
+            <a:r>
+              <a:rPr lang="en-IT" b="1" dirty="0"/>
+              <a:t>173 caselle</a:t>
+            </a:r>
+            <a:r>
+              <a:rPr lang="en-IT" dirty="0"/>
+              <a:t>. Le istruzioni su come compilarlo sono su un foglio separato. Se hai un reddito, aggiungi il Modulo 2: altre 68 caselle. Hai 8 giorni lavorativi per presentarlo — un dettaglio non scritto da nessuna parte nel kit.</a:t>
+            </a:r>
+            <a:br>
+              <a:rPr lang="en-IT" dirty="0"/>
+            </a:br>
+            <a:endParaRPr lang="en-IT" dirty="0"/>
+          </a:p>
+          <a:p>
+            <a:pPr rtl="0"/>
+            <a:r>
+              <a:rPr lang="en-IT" dirty="0"/>
+              <a:t>Quando sbagli, lo scopri solo quando la Questura ti rispedisce tutto indietro. A quel punto il tempo è passato, e ricominciare da capo può far decadere la pratica.</a:t>
+            </a:r>
+          </a:p>
+          <a:p>
+            <a:pPr rtl="0"/>
+            <a:r>
+              <a:rPr lang="en-IT" dirty="0"/>
+              <a:t>Il patronato esiste e aiuta — ma su appuntamento, con le code, negli orari di ufficio...</a:t>
+            </a:r>
+          </a:p>
+          <a:p>
+            <a:pPr rtl="0"/>
+            <a:r>
+              <a:rPr lang="en-GB" dirty="0"/>
+              <a:t>Il nostro </a:t>
+            </a:r>
+            <a:r>
+              <a:rPr lang="en-GB" dirty="0" err="1"/>
+              <a:t>caso</a:t>
+            </a:r>
+            <a:r>
+              <a:rPr lang="en-GB" dirty="0"/>
+              <a:t> </a:t>
+            </a:r>
+            <a:r>
+              <a:rPr lang="en-IT" dirty="0"/>
+              <a:t>non è una disabilità nel senso tradizionale, ma una </a:t>
+            </a:r>
+            <a:r>
+              <a:rPr lang="en-IT" b="1" dirty="0"/>
+              <a:t>fragilità sistemica</a:t>
+            </a:r>
+            <a:r>
+              <a:rPr lang="en-IT" dirty="0"/>
+              <a:t> — linguistica, temporale, burocratica — che trasforma un modulo in un problema.</a:t>
+            </a:r>
+          </a:p>
+          <a:p>
+            <a:br>
+              <a:rPr lang="en-IT" dirty="0"/>
+            </a:br>
+            <a:endParaRPr lang="en-IT" dirty="0"/>
           </a:p>
         </p:txBody>
       </p:sp>
@@ -455,6 +609,66 @@
           <a:bodyPr/>
           <a:lstStyle/>
           <a:p>
+            <a:pPr rtl="0"/>
+            <a:r>
+              <a:rPr lang="en-IT" dirty="0"/>
+              <a:t>La nostra soluzione trasforma questo problema in un percorso: </a:t>
+            </a:r>
+            <a:r>
+              <a:rPr lang="en-IT" b="1" dirty="0"/>
+              <a:t>una domanda alla volta</a:t>
+            </a:r>
+            <a:r>
+              <a:rPr lang="en-IT" dirty="0"/>
+              <a:t>, con la spiegazione accanto, con la validazione in tempo reale, nella lingua di chi compila.</a:t>
+            </a:r>
+            <a:br>
+              <a:rPr lang="en-IT" dirty="0"/>
+            </a:br>
+            <a:endParaRPr lang="en-IT" dirty="0"/>
+          </a:p>
+          <a:p>
+            <a:pPr rtl="0"/>
+            <a:r>
+              <a:rPr lang="en-GB" dirty="0"/>
+              <a:t>Q</a:t>
+            </a:r>
+            <a:r>
+              <a:rPr lang="en-IT" dirty="0"/>
+              <a:t>uello che esiste oggi: la persona apre un foglio con 173 caselle, non capisce cosa mettere, ad esempio, nel campo 47, lascia qualcosa in bianco, e lo scopre settimane dopo quando la pratica viene rifiutata.</a:t>
+            </a:r>
+            <a:br>
+              <a:rPr lang="en-IT" dirty="0"/>
+            </a:br>
+            <a:endParaRPr lang="en-IT" dirty="0"/>
+          </a:p>
+          <a:p>
+            <a:pPr rtl="0"/>
+            <a:r>
+              <a:rPr lang="en-IT" dirty="0"/>
+              <a:t>Q</a:t>
+            </a:r>
+            <a:r>
+              <a:rPr lang="en-GB" dirty="0"/>
+              <a:t>u</a:t>
+            </a:r>
+            <a:r>
+              <a:rPr lang="en-IT" dirty="0"/>
+              <a:t>ello che abbiamo costruito: un'interfaccia guidata, ogni campo ha un titolo chiaro, un esempio, e se inserisce qualcosa di sbagliato — che sia formato errato, dato mancante — lo vede subito, con scritto cosa fare. Arriva in fondo. Stampa il kit compilato. Va in posta.</a:t>
+            </a:r>
+            <a:br>
+              <a:rPr lang="en-IT" dirty="0"/>
+            </a:br>
+            <a:endParaRPr lang="en-IT" dirty="0"/>
+          </a:p>
+          <a:p>
+            <a:pPr rtl="0"/>
+            <a:r>
+              <a:rPr lang="en-IT" dirty="0"/>
+              <a:t>Il guadagno di autonomia è diretto: fa da sola qualcosa che oggi non riesce a fare senza intermediario.</a:t>
+            </a:r>
+          </a:p>
+          <a:p>
             <a:endParaRPr lang="en-US" dirty="0"/>
           </a:p>
         </p:txBody>
@@ -622,6 +836,62 @@
         <p:txBody>
           <a:bodyPr/>
           <a:lstStyle/>
+          <a:p>
+            <a:pPr rtl="0"/>
+            <a:r>
+              <a:rPr lang="en-IT" dirty="0"/>
+              <a:t>Veniamo al come.</a:t>
+            </a:r>
+          </a:p>
+          <a:p>
+            <a:pPr rtl="0"/>
+            <a:endParaRPr lang="en-IT" dirty="0"/>
+          </a:p>
+          <a:p>
+            <a:pPr rtl="0"/>
+            <a:r>
+              <a:rPr lang="en-IT" b="1" dirty="0"/>
+              <a:t>Claude ha costruito lo strumento. Non gira dentro.</a:t>
+            </a:r>
+          </a:p>
+          <a:p>
+            <a:pPr rtl="0"/>
+            <a:endParaRPr lang="en-IT" dirty="0"/>
+          </a:p>
+          <a:p>
+            <a:pPr rtl="0"/>
+            <a:r>
+              <a:rPr lang="en-IT" dirty="0"/>
+              <a:t>Abbiamo usato l'agentic coding per generare e verificare le regole di validazione di ogni campo del MOD. 209 con dati aggiornati dalla normativa vigente. </a:t>
+            </a:r>
+            <a:r>
+              <a:rPr lang="en-GB" dirty="0"/>
+              <a:t>I</a:t>
+            </a:r>
+            <a:r>
+              <a:rPr lang="en-IT" dirty="0"/>
+              <a:t>noltre Claude ha codificato tutta la logica.</a:t>
+            </a:r>
+          </a:p>
+          <a:p>
+            <a:pPr rtl="0"/>
+            <a:endParaRPr lang="en-IT" dirty="0"/>
+          </a:p>
+          <a:p>
+            <a:pPr rtl="0"/>
+            <a:r>
+              <a:rPr lang="en-IT" dirty="0"/>
+              <a:t>Il risultato è un'applicazione con </a:t>
+            </a:r>
+            <a:r>
+              <a:rPr lang="en-IT" b="1" dirty="0"/>
+              <a:t>logica deterministica</a:t>
+            </a:r>
+            <a:r>
+              <a:rPr lang="en-IT" dirty="0"/>
+              <a:t>: nessuna chiamata a un modello in produzione, nessuna traduzione automatica in runtime. Al momento traduzioni in 3 lingue sono state generate con Claude ma utilizza i18n quindi è aperto a N traduzioni.</a:t>
+            </a:r>
+          </a:p>
           <a:p>
             <a:endParaRPr lang="en-US" dirty="0"/>
           </a:p>
@@ -5786,7 +6056,7 @@
                 <a:ea typeface="Arial" pitchFamily="34" charset="-122"/>
                 <a:cs typeface="Arial" pitchFamily="34" charset="-120"/>
               </a:rPr>
-              <a:t>Testi tradotti a priori in 6 lingue. Nessuna traduzione automatica in produzione.</a:t>
+              <a:t>Testi tradotti a priori in 3 lingue. Nessuna traduzione automatica in produzione.</a:t>
             </a:r>
             <a:endParaRPr lang="en-US" sz="1200" dirty="0"/>
           </a:p>
